--- a/figures/cue_accumulation/cue_accumulation_task.pptx
+++ b/figures/cue_accumulation/cue_accumulation_task.pptx
@@ -7,7 +7,7 @@
   <p:sldIdLst>
     <p:sldId id="256" r:id="rId7"/>
   </p:sldIdLst>
-  <p:sldSz cx="12192000" cy="4572000" type="screen4x3"/>
+  <p:sldSz cx="12192000" cy="6858000" type="screen4x3"/>
   <p:notesSz cx="6858000" cy="9144000"/>
   <p:defaultTextStyle>
     <a:defPPr>
@@ -3096,8 +3096,8 @@
         </p:nvSpPr>
         <p:spPr>
           <a:xfrm>
-            <a:off x="4647184" y="118110"/>
-            <a:ext cx="2897632" cy="525780"/>
+            <a:off x="4701514" y="1342405"/>
+            <a:ext cx="2788970" cy="506063"/>
           </a:xfrm>
           <a:prstGeom prst="rect">
             <a:avLst/>
@@ -3113,7 +3113,7 @@
           <a:p>
             <a:pPr algn="ctr"/>
             <a:r>
-              <a:rPr sz="2300" b="1" i="0">
+              <a:rPr sz="2213" b="1" i="0">
                 <a:solidFill>
                   <a:srgbClr val="3F3F3F"/>
                 </a:solidFill>
@@ -3132,8 +3132,8 @@
         </p:nvSpPr>
         <p:spPr>
           <a:xfrm>
-            <a:off x="1438528" y="562610"/>
-            <a:ext cx="9314942" cy="297180"/>
+            <a:off x="1613184" y="1770237"/>
+            <a:ext cx="8965631" cy="286035"/>
           </a:xfrm>
           <a:prstGeom prst="rect">
             <a:avLst/>
@@ -3149,7 +3149,7 @@
           <a:p>
             <a:pPr algn="ctr"/>
             <a:r>
-              <a:rPr sz="1300" b="0" i="1">
+              <a:rPr sz="1251" b="0" i="1">
                 <a:solidFill>
                   <a:srgbClr val="666666"/>
                 </a:solidFill>
@@ -3168,13 +3168,13 @@
         </p:nvCxnSpPr>
         <p:spPr>
           <a:xfrm>
-            <a:off x="2095500" y="1752600"/>
-            <a:ext cx="6375400" cy="0"/>
+            <a:off x="2245518" y="2915602"/>
+            <a:ext cx="6136323" cy="0"/>
           </a:xfrm>
           <a:prstGeom prst="line">
             <a:avLst/>
           </a:prstGeom>
-          <a:ln w="15240">
+          <a:ln w="14668">
             <a:solidFill>
               <a:srgbClr val="7C7C7C"/>
             </a:solidFill>
@@ -3203,13 +3203,13 @@
         </p:nvCxnSpPr>
         <p:spPr>
           <a:xfrm>
-            <a:off x="2095500" y="2717800"/>
-            <a:ext cx="6375400" cy="0"/>
+            <a:off x="2245518" y="3844607"/>
+            <a:ext cx="6136323" cy="0"/>
           </a:xfrm>
           <a:prstGeom prst="line">
             <a:avLst/>
           </a:prstGeom>
-          <a:ln w="15240">
+          <a:ln w="14668">
             <a:solidFill>
               <a:srgbClr val="7C7C7C"/>
             </a:solidFill>
@@ -3238,8 +3238,8 @@
         </p:nvSpPr>
         <p:spPr>
           <a:xfrm>
-            <a:off x="1098804" y="1604010"/>
-            <a:ext cx="818896" cy="297180"/>
+            <a:off x="1286198" y="2772584"/>
+            <a:ext cx="788187" cy="286035"/>
           </a:xfrm>
           <a:prstGeom prst="rect">
             <a:avLst/>
@@ -3255,7 +3255,7 @@
           <a:p>
             <a:pPr algn="r"/>
             <a:r>
-              <a:rPr sz="1300" b="1" i="0">
+              <a:rPr sz="1251" b="1" i="0">
                 <a:solidFill>
                   <a:srgbClr val="4C78A8"/>
                 </a:solidFill>
@@ -3274,8 +3274,8 @@
         </p:nvSpPr>
         <p:spPr>
           <a:xfrm>
-            <a:off x="996441" y="2569210"/>
-            <a:ext cx="921258" cy="297180"/>
+            <a:off x="1187675" y="3701589"/>
+            <a:ext cx="886710" cy="286035"/>
           </a:xfrm>
           <a:prstGeom prst="rect">
             <a:avLst/>
@@ -3291,7 +3291,7 @@
           <a:p>
             <a:pPr algn="r"/>
             <a:r>
-              <a:rPr sz="1300" b="1" i="0">
+              <a:rPr sz="1251" b="1" i="0">
                 <a:solidFill>
                   <a:srgbClr val="E4794A"/>
                 </a:solidFill>
@@ -3310,8 +3310,8 @@
         </p:nvSpPr>
         <p:spPr>
           <a:xfrm>
-            <a:off x="5803900" y="1143000"/>
-            <a:ext cx="2667000" cy="1727200"/>
+            <a:off x="5814853" y="2328862"/>
+            <a:ext cx="2566987" cy="1662430"/>
           </a:xfrm>
           <a:prstGeom prst="rect">
             <a:avLst/>
@@ -3356,8 +3356,8 @@
         </p:nvSpPr>
         <p:spPr>
           <a:xfrm>
-            <a:off x="6881495" y="1223010"/>
-            <a:ext cx="511809" cy="297180"/>
+            <a:off x="6852038" y="2405872"/>
+            <a:ext cx="492617" cy="286035"/>
           </a:xfrm>
           <a:prstGeom prst="rect">
             <a:avLst/>
@@ -3373,7 +3373,7 @@
           <a:p>
             <a:pPr algn="ctr"/>
             <a:r>
-              <a:rPr sz="1300" b="1" i="0">
+              <a:rPr sz="1251" b="1" i="0">
                 <a:solidFill>
                   <a:srgbClr val="888888"/>
                 </a:solidFill>
@@ -3392,8 +3392,8 @@
         </p:nvSpPr>
         <p:spPr>
           <a:xfrm>
-            <a:off x="6617716" y="1474470"/>
-            <a:ext cx="1039368" cy="251460"/>
+            <a:off x="6598151" y="2647902"/>
+            <a:ext cx="1000391" cy="242030"/>
           </a:xfrm>
           <a:prstGeom prst="rect">
             <a:avLst/>
@@ -3409,7 +3409,7 @@
           <a:p>
             <a:pPr algn="ctr"/>
             <a:r>
-              <a:rPr sz="1100" b="0" i="1">
+              <a:rPr sz="1058" b="0" i="1">
                 <a:solidFill>
                   <a:srgbClr val="999999"/>
                 </a:solidFill>
@@ -3428,8 +3428,8 @@
         </p:nvSpPr>
         <p:spPr>
           <a:xfrm>
-            <a:off x="27580590000" y="15483840000"/>
-            <a:ext cx="4516120000" cy="6774180000"/>
+            <a:off x="2324100" y="2400300"/>
+            <a:ext cx="342900" cy="520700"/>
           </a:xfrm>
           <a:custGeom>
             <a:avLst/>
@@ -3438,30 +3438,30 @@
             <a:cxnLst/>
             <a:rect l="l" t="t" r="r" b="b"/>
             <a:pathLst>
-              <a:path w="355600" h="533400">
+              <a:path w="27" h="41">
                 <a:moveTo>
-                  <a:pt x="0" y="533400"/>
+                  <a:pt x="0" y="41"/>
                 </a:moveTo>
                 <a:lnTo>
-                  <a:pt x="76200" y="533400"/>
+                  <a:pt x="5" y="41"/>
                 </a:lnTo>
                 <a:lnTo>
-                  <a:pt x="76200" y="0"/>
+                  <a:pt x="5" y="0"/>
                 </a:lnTo>
                 <a:lnTo>
-                  <a:pt x="279400" y="0"/>
+                  <a:pt x="21" y="0"/>
                 </a:lnTo>
                 <a:lnTo>
-                  <a:pt x="279400" y="533400"/>
+                  <a:pt x="21" y="41"/>
                 </a:lnTo>
                 <a:lnTo>
-                  <a:pt x="355600" y="533400"/>
+                  <a:pt x="27" y="41"/>
                 </a:lnTo>
               </a:path>
             </a:pathLst>
           </a:custGeom>
           <a:noFill/>
-          <a:ln w="30480">
+          <a:ln w="29337">
             <a:solidFill>
               <a:srgbClr val="4C78A8"/>
             </a:solidFill>
@@ -3498,8 +3498,8 @@
         </p:nvSpPr>
         <p:spPr>
           <a:xfrm>
-            <a:off x="2095500" y="965200"/>
-            <a:ext cx="508000" cy="228600"/>
+            <a:off x="2245518" y="2157730"/>
+            <a:ext cx="488950" cy="220027"/>
           </a:xfrm>
           <a:prstGeom prst="rect">
             <a:avLst/>
@@ -3515,7 +3515,7 @@
           <a:p>
             <a:pPr algn="ctr"/>
             <a:r>
-              <a:rPr sz="1000" b="0" i="0">
+              <a:rPr sz="962" b="0" i="0">
                 <a:solidFill>
                   <a:srgbClr val="4C78A8"/>
                 </a:solidFill>
@@ -3534,8 +3534,8 @@
         </p:nvSpPr>
         <p:spPr>
           <a:xfrm>
-            <a:off x="37257990000" y="27741880000"/>
-            <a:ext cx="4516120000" cy="6774180000"/>
+            <a:off x="3048000" y="3327400"/>
+            <a:ext cx="342900" cy="520700"/>
           </a:xfrm>
           <a:custGeom>
             <a:avLst/>
@@ -3544,30 +3544,30 @@
             <a:cxnLst/>
             <a:rect l="l" t="t" r="r" b="b"/>
             <a:pathLst>
-              <a:path w="355600" h="533400">
+              <a:path w="27" h="41">
                 <a:moveTo>
-                  <a:pt x="0" y="533400"/>
+                  <a:pt x="0" y="41"/>
                 </a:moveTo>
                 <a:lnTo>
-                  <a:pt x="76200" y="533400"/>
+                  <a:pt x="6" y="41"/>
                 </a:lnTo>
                 <a:lnTo>
-                  <a:pt x="76200" y="0"/>
+                  <a:pt x="6" y="0"/>
                 </a:lnTo>
                 <a:lnTo>
-                  <a:pt x="279400" y="0"/>
+                  <a:pt x="22" y="0"/>
                 </a:lnTo>
                 <a:lnTo>
-                  <a:pt x="279400" y="533400"/>
+                  <a:pt x="22" y="41"/>
                 </a:lnTo>
                 <a:lnTo>
-                  <a:pt x="355600" y="533400"/>
+                  <a:pt x="27" y="41"/>
                 </a:lnTo>
               </a:path>
             </a:pathLst>
           </a:custGeom>
           <a:noFill/>
-          <a:ln w="30480">
+          <a:ln w="29337">
             <a:solidFill>
               <a:srgbClr val="E4794A"/>
             </a:solidFill>
@@ -3604,8 +3604,8 @@
         </p:nvSpPr>
         <p:spPr>
           <a:xfrm>
-            <a:off x="2857500" y="2806700"/>
-            <a:ext cx="508000" cy="228600"/>
+            <a:off x="2978943" y="3930173"/>
+            <a:ext cx="488950" cy="220027"/>
           </a:xfrm>
           <a:prstGeom prst="rect">
             <a:avLst/>
@@ -3621,7 +3621,7 @@
           <a:p>
             <a:pPr algn="ctr"/>
             <a:r>
-              <a:rPr sz="1000" b="0" i="0">
+              <a:rPr sz="962" b="0" i="0">
                 <a:solidFill>
                   <a:srgbClr val="E4794A"/>
                 </a:solidFill>
@@ -3640,8 +3640,8 @@
         </p:nvSpPr>
         <p:spPr>
           <a:xfrm>
-            <a:off x="46935390000" y="15483840000"/>
-            <a:ext cx="4516120000" cy="6774180000"/>
+            <a:off x="3784600" y="2400300"/>
+            <a:ext cx="342900" cy="520700"/>
           </a:xfrm>
           <a:custGeom>
             <a:avLst/>
@@ -3650,30 +3650,30 @@
             <a:cxnLst/>
             <a:rect l="l" t="t" r="r" b="b"/>
             <a:pathLst>
-              <a:path w="355600" h="533400">
+              <a:path w="27" h="41">
                 <a:moveTo>
-                  <a:pt x="0" y="533400"/>
+                  <a:pt x="0" y="41"/>
                 </a:moveTo>
                 <a:lnTo>
-                  <a:pt x="76200" y="533400"/>
+                  <a:pt x="6" y="41"/>
                 </a:lnTo>
                 <a:lnTo>
-                  <a:pt x="76200" y="0"/>
+                  <a:pt x="6" y="0"/>
                 </a:lnTo>
                 <a:lnTo>
-                  <a:pt x="279400" y="0"/>
+                  <a:pt x="21" y="0"/>
                 </a:lnTo>
                 <a:lnTo>
-                  <a:pt x="279400" y="533400"/>
+                  <a:pt x="21" y="41"/>
                 </a:lnTo>
                 <a:lnTo>
-                  <a:pt x="355600" y="533400"/>
+                  <a:pt x="27" y="41"/>
                 </a:lnTo>
               </a:path>
             </a:pathLst>
           </a:custGeom>
           <a:noFill/>
-          <a:ln w="30480">
+          <a:ln w="29337">
             <a:solidFill>
               <a:srgbClr val="4C78A8"/>
             </a:solidFill>
@@ -3710,8 +3710,8 @@
         </p:nvSpPr>
         <p:spPr>
           <a:xfrm>
-            <a:off x="3619500" y="965200"/>
-            <a:ext cx="508000" cy="228600"/>
+            <a:off x="3712368" y="2157730"/>
+            <a:ext cx="488950" cy="220027"/>
           </a:xfrm>
           <a:prstGeom prst="rect">
             <a:avLst/>
@@ -3727,7 +3727,7 @@
           <a:p>
             <a:pPr algn="ctr"/>
             <a:r>
-              <a:rPr sz="1000" b="0" i="0">
+              <a:rPr sz="962" b="0" i="0">
                 <a:solidFill>
                   <a:srgbClr val="4C78A8"/>
                 </a:solidFill>
@@ -3746,8 +3746,8 @@
         </p:nvSpPr>
         <p:spPr>
           <a:xfrm>
-            <a:off x="56612790000" y="15483840000"/>
-            <a:ext cx="4516120000" cy="6774180000"/>
+            <a:off x="4521200" y="2400300"/>
+            <a:ext cx="342900" cy="520700"/>
           </a:xfrm>
           <a:custGeom>
             <a:avLst/>
@@ -3756,30 +3756,30 @@
             <a:cxnLst/>
             <a:rect l="l" t="t" r="r" b="b"/>
             <a:pathLst>
-              <a:path w="355600" h="533400">
+              <a:path w="27" h="41">
                 <a:moveTo>
-                  <a:pt x="0" y="533400"/>
+                  <a:pt x="0" y="41"/>
                 </a:moveTo>
                 <a:lnTo>
-                  <a:pt x="76200" y="533400"/>
+                  <a:pt x="6" y="41"/>
                 </a:lnTo>
                 <a:lnTo>
-                  <a:pt x="76200" y="0"/>
+                  <a:pt x="6" y="0"/>
                 </a:lnTo>
                 <a:lnTo>
-                  <a:pt x="279400" y="0"/>
+                  <a:pt x="21" y="0"/>
                 </a:lnTo>
                 <a:lnTo>
-                  <a:pt x="279400" y="533400"/>
+                  <a:pt x="21" y="41"/>
                 </a:lnTo>
                 <a:lnTo>
-                  <a:pt x="355600" y="533400"/>
+                  <a:pt x="27" y="41"/>
                 </a:lnTo>
               </a:path>
             </a:pathLst>
           </a:custGeom>
           <a:noFill/>
-          <a:ln w="30480">
+          <a:ln w="29337">
             <a:solidFill>
               <a:srgbClr val="4C78A8"/>
             </a:solidFill>
@@ -3816,8 +3816,8 @@
         </p:nvSpPr>
         <p:spPr>
           <a:xfrm>
-            <a:off x="4381500" y="965200"/>
-            <a:ext cx="508000" cy="228600"/>
+            <a:off x="4445793" y="2157730"/>
+            <a:ext cx="488950" cy="220027"/>
           </a:xfrm>
           <a:prstGeom prst="rect">
             <a:avLst/>
@@ -3833,7 +3833,7 @@
           <a:p>
             <a:pPr algn="ctr"/>
             <a:r>
-              <a:rPr sz="1000" b="0" i="0">
+              <a:rPr sz="962" b="0" i="0">
                 <a:solidFill>
                   <a:srgbClr val="4C78A8"/>
                 </a:solidFill>
@@ -3852,8 +3852,8 @@
         </p:nvSpPr>
         <p:spPr>
           <a:xfrm>
-            <a:off x="66290190000" y="27741880000"/>
-            <a:ext cx="4516120000" cy="6774180000"/>
+            <a:off x="5257800" y="3327400"/>
+            <a:ext cx="342900" cy="520700"/>
           </a:xfrm>
           <a:custGeom>
             <a:avLst/>
@@ -3862,30 +3862,30 @@
             <a:cxnLst/>
             <a:rect l="l" t="t" r="r" b="b"/>
             <a:pathLst>
-              <a:path w="355600" h="533400">
+              <a:path w="27" h="41">
                 <a:moveTo>
-                  <a:pt x="0" y="533400"/>
+                  <a:pt x="0" y="41"/>
                 </a:moveTo>
                 <a:lnTo>
-                  <a:pt x="76200" y="533400"/>
+                  <a:pt x="5" y="41"/>
                 </a:lnTo>
                 <a:lnTo>
-                  <a:pt x="76200" y="0"/>
+                  <a:pt x="5" y="0"/>
                 </a:lnTo>
                 <a:lnTo>
-                  <a:pt x="279400" y="0"/>
+                  <a:pt x="21" y="0"/>
                 </a:lnTo>
                 <a:lnTo>
-                  <a:pt x="279400" y="533400"/>
+                  <a:pt x="21" y="41"/>
                 </a:lnTo>
                 <a:lnTo>
-                  <a:pt x="355600" y="533400"/>
+                  <a:pt x="27" y="41"/>
                 </a:lnTo>
               </a:path>
             </a:pathLst>
           </a:custGeom>
           <a:noFill/>
-          <a:ln w="30480">
+          <a:ln w="29337">
             <a:solidFill>
               <a:srgbClr val="E4794A"/>
             </a:solidFill>
@@ -3922,8 +3922,8 @@
         </p:nvSpPr>
         <p:spPr>
           <a:xfrm>
-            <a:off x="5143500" y="2806700"/>
-            <a:ext cx="508000" cy="228600"/>
+            <a:off x="5179218" y="3930173"/>
+            <a:ext cx="488950" cy="220027"/>
           </a:xfrm>
           <a:prstGeom prst="rect">
             <a:avLst/>
@@ -3939,7 +3939,7 @@
           <a:p>
             <a:pPr algn="ctr"/>
             <a:r>
-              <a:rPr sz="1000" b="0" i="0">
+              <a:rPr sz="962" b="0" i="0">
                 <a:solidFill>
                   <a:srgbClr val="E4794A"/>
                 </a:solidFill>
@@ -3958,13 +3958,13 @@
         </p:nvCxnSpPr>
         <p:spPr>
           <a:xfrm>
-            <a:off x="2095500" y="3276600"/>
-            <a:ext cx="6451600" cy="0"/>
+            <a:off x="2245518" y="4382452"/>
+            <a:ext cx="6209665" cy="0"/>
           </a:xfrm>
           <a:prstGeom prst="line">
             <a:avLst/>
           </a:prstGeom>
-          <a:ln w="17780">
+          <a:ln w="17113">
             <a:solidFill>
               <a:srgbClr val="7C7C7C"/>
             </a:solidFill>
@@ -3994,8 +3994,8 @@
         </p:nvSpPr>
         <p:spPr>
           <a:xfrm>
-            <a:off x="8623300" y="3139440"/>
-            <a:ext cx="508000" cy="274320"/>
+            <a:off x="8528526" y="4250436"/>
+            <a:ext cx="488950" cy="264033"/>
           </a:xfrm>
           <a:prstGeom prst="rect">
             <a:avLst/>
@@ -4011,7 +4011,7 @@
           <a:p>
             <a:pPr algn="l"/>
             <a:r>
-              <a:rPr sz="1200" b="0" i="0">
+              <a:rPr sz="1155" b="0" i="0">
                 <a:solidFill>
                   <a:srgbClr val="888888"/>
                 </a:solidFill>
@@ -4030,13 +4030,13 @@
         </p:nvCxnSpPr>
         <p:spPr>
           <a:xfrm>
-            <a:off x="8902700" y="1143000"/>
-            <a:ext cx="0" cy="2133600"/>
+            <a:off x="8797448" y="2328862"/>
+            <a:ext cx="0" cy="2053590"/>
           </a:xfrm>
           <a:prstGeom prst="line">
             <a:avLst/>
           </a:prstGeom>
-          <a:ln w="20320">
+          <a:ln w="19558">
             <a:solidFill>
               <a:srgbClr val="336633"/>
             </a:solidFill>
@@ -4066,8 +4066,8 @@
         </p:nvSpPr>
         <p:spPr>
           <a:xfrm>
-            <a:off x="8619236" y="853440"/>
-            <a:ext cx="566928" cy="274320"/>
+            <a:off x="8524614" y="2050161"/>
+            <a:ext cx="545668" cy="264033"/>
           </a:xfrm>
           <a:prstGeom prst="rect">
             <a:avLst/>
@@ -4083,7 +4083,7 @@
           <a:p>
             <a:pPr algn="ctr"/>
             <a:r>
-              <a:rPr sz="1200" b="1" i="0">
+              <a:rPr sz="1155" b="1" i="0">
                 <a:solidFill>
                   <a:srgbClr val="336633"/>
                 </a:solidFill>
@@ -4102,13 +4102,13 @@
         </p:nvCxnSpPr>
         <p:spPr>
           <a:xfrm>
-            <a:off x="8953500" y="1828800"/>
-            <a:ext cx="279400" cy="0"/>
+            <a:off x="8846343" y="2988945"/>
+            <a:ext cx="268923" cy="0"/>
           </a:xfrm>
           <a:prstGeom prst="line">
             <a:avLst/>
           </a:prstGeom>
-          <a:ln w="19050">
+          <a:ln w="18335">
             <a:solidFill>
               <a:srgbClr val="7C7C7C"/>
             </a:solidFill>
@@ -4138,8 +4138,8 @@
         </p:nvSpPr>
         <p:spPr>
           <a:xfrm>
-            <a:off x="9283700" y="1422400"/>
-            <a:ext cx="2489200" cy="812800"/>
+            <a:off x="9164161" y="2597785"/>
+            <a:ext cx="2395855" cy="782320"/>
           </a:xfrm>
           <a:prstGeom prst="roundRect">
             <a:avLst/>
@@ -4147,7 +4147,7 @@
           <a:solidFill>
             <a:srgbClr val="FFFFFF"/>
           </a:solidFill>
-          <a:ln w="20320">
+          <a:ln w="19558">
             <a:solidFill>
               <a:srgbClr val="3F3F3F"/>
             </a:solidFill>
@@ -4184,8 +4184,8 @@
         </p:nvSpPr>
         <p:spPr>
           <a:xfrm>
-            <a:off x="9811766" y="1578610"/>
-            <a:ext cx="1433068" cy="297180"/>
+            <a:off x="9672424" y="2748137"/>
+            <a:ext cx="1379327" cy="286035"/>
           </a:xfrm>
           <a:prstGeom prst="rect">
             <a:avLst/>
@@ -4201,7 +4201,7 @@
           <a:p>
             <a:pPr algn="ctr"/>
             <a:r>
-              <a:rPr sz="1300" b="1" i="0">
+              <a:rPr sz="1251" b="1" i="0">
                 <a:solidFill>
                   <a:srgbClr val="3F3F3F"/>
                 </a:solidFill>
@@ -4220,8 +4220,8 @@
         </p:nvSpPr>
         <p:spPr>
           <a:xfrm>
-            <a:off x="10016490" y="1819910"/>
-            <a:ext cx="1023619" cy="297180"/>
+            <a:off x="9869471" y="2980388"/>
+            <a:ext cx="985234" cy="286035"/>
           </a:xfrm>
           <a:prstGeom prst="rect">
             <a:avLst/>
@@ -4237,7 +4237,7 @@
           <a:p>
             <a:pPr algn="ctr"/>
             <a:r>
-              <a:rPr sz="1300" b="1" i="0">
+              <a:rPr sz="1251" b="1" i="0">
                 <a:solidFill>
                   <a:srgbClr val="3F3F3F"/>
                 </a:solidFill>
@@ -4256,8 +4256,8 @@
         </p:nvSpPr>
         <p:spPr>
           <a:xfrm>
-            <a:off x="9315704" y="2379980"/>
-            <a:ext cx="2425192" cy="320040"/>
+            <a:off x="9194965" y="3519455"/>
+            <a:ext cx="2334247" cy="308038"/>
           </a:xfrm>
           <a:prstGeom prst="rect">
             <a:avLst/>
@@ -4273,7 +4273,7 @@
           <a:p>
             <a:pPr algn="ctr"/>
             <a:r>
-              <a:rPr sz="1400" b="1" i="0">
+              <a:rPr sz="1347" b="1" i="0">
                 <a:solidFill>
                   <a:srgbClr val="336633"/>
                 </a:solidFill>
